--- a/lecons/USA/Practical Geography/USA_PRA_FW06_Fieldwork_on_Economic_Activities.pptx
+++ b/lecons/USA/Practical Geography/USA_PRA_FW06_Fieldwork_on_Economic_Activities.pptx
@@ -6495,7 +6495,7 @@
                 <a:ea typeface="Times New Roman" pitchFamily="34" charset="-122"/>
                 <a:cs typeface="Times New Roman" pitchFamily="34" charset="-120"/>
               </a:rPr>
-              <a:t>Field Work 6: Fieldwork on Economic Activities</a:t>
+              <a:t>Field Work 6</a:t>
             </a:r>
             <a:endParaRPr lang="en-US" sz="2600" dirty="0"/>
           </a:p>
